--- a/CT_and_Model_Drift.pptx
+++ b/CT_and_Model_Drift.pptx
@@ -5,7 +5,7 @@
     <p:sldMasterId id="2147483660" r:id="rId4"/>
   </p:sldMasterIdLst>
   <p:notesMasterIdLst>
-    <p:notesMasterId r:id="rId11"/>
+    <p:notesMasterId r:id="rId12"/>
   </p:notesMasterIdLst>
   <p:sldIdLst>
     <p:sldId id="256" r:id="rId5"/>
@@ -13,7 +13,8 @@
     <p:sldId id="312" r:id="rId7"/>
     <p:sldId id="391" r:id="rId8"/>
     <p:sldId id="390" r:id="rId9"/>
-    <p:sldId id="389" r:id="rId10"/>
+    <p:sldId id="392" r:id="rId10"/>
+    <p:sldId id="389" r:id="rId11"/>
   </p:sldIdLst>
   <p:sldSz cx="12192000" cy="6858000"/>
   <p:notesSz cx="6858000" cy="9144000"/>
@@ -223,7 +224,7 @@
           <a:p>
             <a:fld id="{68F33786-69FA-47D8-964E-2BB12BEAF6E1}" type="datetimeFigureOut">
               <a:rPr lang="fr-FR" smtClean="0"/>
-              <a:t>31/03/2025</a:t>
+              <a:t>08/04/2025</a:t>
             </a:fld>
             <a:endParaRPr lang="fr-FR"/>
           </a:p>
@@ -13013,48 +13014,16 @@
           </a:p>
         </p:txBody>
       </p:sp>
-      <p:cxnSp>
-        <p:nvCxnSpPr>
-          <p:cNvPr id="8" name="Connecteur droit 7"/>
-          <p:cNvCxnSpPr>
-            <a:stCxn id="3" idx="2"/>
-          </p:cNvCxnSpPr>
-          <p:nvPr/>
-        </p:nvCxnSpPr>
-        <p:spPr>
-          <a:xfrm flipH="1">
-            <a:off x="6087292" y="1920240"/>
-            <a:ext cx="1138" cy="4193177"/>
-          </a:xfrm>
-          <a:prstGeom prst="line">
-            <a:avLst/>
-          </a:prstGeom>
-        </p:spPr>
-        <p:style>
-          <a:lnRef idx="1">
-            <a:schemeClr val="accent1"/>
-          </a:lnRef>
-          <a:fillRef idx="0">
-            <a:schemeClr val="accent1"/>
-          </a:fillRef>
-          <a:effectRef idx="0">
-            <a:schemeClr val="accent1"/>
-          </a:effectRef>
-          <a:fontRef idx="minor">
-            <a:schemeClr val="tx1"/>
-          </a:fontRef>
-        </p:style>
-      </p:cxnSp>
-      <p:sp>
-        <p:nvSpPr>
-          <p:cNvPr id="10" name="ZoneTexte 9"/>
+      <p:sp>
+        <p:nvSpPr>
+          <p:cNvPr id="6" name="ZoneTexte 5"/>
           <p:cNvSpPr txBox="1"/>
           <p:nvPr/>
         </p:nvSpPr>
         <p:spPr>
           <a:xfrm>
-            <a:off x="1672046" y="2050869"/>
-            <a:ext cx="2220685" cy="369332"/>
+            <a:off x="1522961" y="1528354"/>
+            <a:ext cx="9130937" cy="369332"/>
           </a:xfrm>
           <a:prstGeom prst="rect">
             <a:avLst/>
@@ -13069,23 +13038,39 @@
           <a:p>
             <a:pPr algn="ctr"/>
             <a:r>
-              <a:rPr lang="fr-FR" b="1" dirty="0" smtClean="0"/>
-              <a:t>Concept drift</a:t>
-            </a:r>
-            <a:endParaRPr lang="fr-FR" b="1" dirty="0"/>
-          </a:p>
-        </p:txBody>
-      </p:sp>
-      <p:sp>
-        <p:nvSpPr>
-          <p:cNvPr id="13" name="ZoneTexte 12"/>
+              <a:rPr lang="fr-FR" dirty="0" smtClean="0"/>
+              <a:t>Data drift </a:t>
+            </a:r>
+            <a:r>
+              <a:rPr lang="fr-FR" dirty="0" err="1" smtClean="0"/>
+              <a:t>occurs</a:t>
+            </a:r>
+            <a:r>
+              <a:rPr lang="fr-FR" dirty="0" smtClean="0"/>
+              <a:t> </a:t>
+            </a:r>
+            <a:r>
+              <a:rPr lang="fr-FR" dirty="0" err="1" smtClean="0"/>
+              <a:t>when</a:t>
+            </a:r>
+            <a:r>
+              <a:rPr lang="fr-FR" dirty="0" smtClean="0"/>
+              <a:t> the distribution of the input variable changes over time </a:t>
+            </a:r>
+            <a:endParaRPr lang="fr-FR" dirty="0"/>
+          </a:p>
+        </p:txBody>
+      </p:sp>
+      <p:sp>
+        <p:nvSpPr>
+          <p:cNvPr id="9" name="ZoneTexte 8"/>
           <p:cNvSpPr txBox="1"/>
           <p:nvPr/>
         </p:nvSpPr>
         <p:spPr>
           <a:xfrm>
-            <a:off x="8120743" y="2050869"/>
-            <a:ext cx="2220685" cy="369332"/>
+            <a:off x="6831873" y="2951877"/>
+            <a:ext cx="3984173" cy="1323439"/>
           </a:xfrm>
           <a:prstGeom prst="rect">
             <a:avLst/>
@@ -13100,84 +13085,169 @@
           <a:p>
             <a:pPr algn="ctr"/>
             <a:r>
-              <a:rPr lang="fr-FR" b="1" dirty="0" smtClean="0"/>
-              <a:t>Data drift</a:t>
-            </a:r>
-            <a:endParaRPr lang="fr-FR" b="1" dirty="0"/>
-          </a:p>
-        </p:txBody>
-      </p:sp>
-      <p:sp>
-        <p:nvSpPr>
-          <p:cNvPr id="15" name="ZoneTexte 14"/>
-          <p:cNvSpPr txBox="1"/>
+              <a:rPr lang="fr-FR" sz="1600" dirty="0" err="1" smtClean="0"/>
+              <a:t>Example</a:t>
+            </a:r>
+            <a:r>
+              <a:rPr lang="fr-FR" sz="1600" dirty="0" smtClean="0"/>
+              <a:t> : </a:t>
+            </a:r>
+            <a:r>
+              <a:rPr lang="fr-FR" sz="1600" dirty="0" err="1" smtClean="0"/>
+              <a:t>prediction</a:t>
+            </a:r>
+            <a:r>
+              <a:rPr lang="fr-FR" sz="1600" dirty="0" smtClean="0"/>
+              <a:t> of </a:t>
+            </a:r>
+            <a:r>
+              <a:rPr lang="fr-FR" sz="1600" dirty="0" err="1" smtClean="0"/>
+              <a:t>average</a:t>
+            </a:r>
+            <a:r>
+              <a:rPr lang="fr-FR" sz="1600" dirty="0" smtClean="0"/>
+              <a:t> </a:t>
+            </a:r>
+            <a:r>
+              <a:rPr lang="fr-FR" sz="1600" dirty="0" err="1" smtClean="0"/>
+              <a:t>health</a:t>
+            </a:r>
+            <a:r>
+              <a:rPr lang="fr-FR" sz="1600" dirty="0" smtClean="0"/>
+              <a:t> </a:t>
+            </a:r>
+            <a:r>
+              <a:rPr lang="fr-FR" sz="1600" dirty="0" err="1" smtClean="0"/>
+              <a:t>spending</a:t>
+            </a:r>
+            <a:r>
+              <a:rPr lang="fr-FR" sz="1600" dirty="0" smtClean="0"/>
+              <a:t> per </a:t>
+            </a:r>
+            <a:r>
+              <a:rPr lang="fr-FR" sz="1600" dirty="0" err="1" smtClean="0"/>
+              <a:t>person</a:t>
+            </a:r>
+            <a:r>
+              <a:rPr lang="fr-FR" sz="1600" dirty="0" smtClean="0"/>
+              <a:t> in China </a:t>
+            </a:r>
+            <a:r>
+              <a:rPr lang="fr-FR" sz="1600" dirty="0" err="1" smtClean="0"/>
+              <a:t>based</a:t>
+            </a:r>
+            <a:r>
+              <a:rPr lang="fr-FR" sz="1600" dirty="0" smtClean="0"/>
+              <a:t> on </a:t>
+            </a:r>
+            <a:r>
+              <a:rPr lang="fr-FR" sz="1600" dirty="0" err="1" smtClean="0"/>
+              <a:t>age</a:t>
+            </a:r>
+            <a:r>
+              <a:rPr lang="fr-FR" sz="1600" dirty="0" smtClean="0"/>
+              <a:t> distribution and </a:t>
+            </a:r>
+            <a:r>
+              <a:rPr lang="fr-FR" sz="1600" dirty="0" err="1" smtClean="0"/>
+              <a:t>other</a:t>
+            </a:r>
+            <a:r>
+              <a:rPr lang="fr-FR" sz="1600" dirty="0" smtClean="0"/>
+              <a:t> </a:t>
+            </a:r>
+            <a:r>
+              <a:rPr lang="fr-FR" sz="1600" dirty="0" err="1" smtClean="0"/>
+              <a:t>factors</a:t>
+            </a:r>
+            <a:r>
+              <a:rPr lang="fr-FR" sz="1600" dirty="0"/>
+              <a:t>.</a:t>
+            </a:r>
+            <a:endParaRPr lang="fr-FR" sz="1600" dirty="0" smtClean="0"/>
+          </a:p>
+          <a:p>
+            <a:pPr algn="ctr"/>
+            <a:r>
+              <a:rPr lang="fr-FR" sz="1600" dirty="0" smtClean="0"/>
+              <a:t>A model </a:t>
+            </a:r>
+            <a:r>
+              <a:rPr lang="fr-FR" sz="1600" dirty="0" err="1" smtClean="0"/>
+              <a:t>trained</a:t>
+            </a:r>
+            <a:r>
+              <a:rPr lang="fr-FR" sz="1600" dirty="0" smtClean="0"/>
+              <a:t> on 2000 data </a:t>
+            </a:r>
+            <a:r>
+              <a:rPr lang="fr-FR" sz="1600" dirty="0" err="1" smtClean="0"/>
+              <a:t>will</a:t>
+            </a:r>
+            <a:r>
+              <a:rPr lang="fr-FR" sz="1600" dirty="0" smtClean="0"/>
+              <a:t> </a:t>
+            </a:r>
+            <a:r>
+              <a:rPr lang="fr-FR" sz="1600" dirty="0" err="1" smtClean="0"/>
+              <a:t>be</a:t>
+            </a:r>
+            <a:r>
+              <a:rPr lang="fr-FR" sz="1600" dirty="0" smtClean="0"/>
+              <a:t> </a:t>
+            </a:r>
+            <a:r>
+              <a:rPr lang="fr-FR" sz="1600" dirty="0" err="1" smtClean="0"/>
+              <a:t>obsolete</a:t>
+            </a:r>
+            <a:r>
+              <a:rPr lang="fr-FR" sz="1600" dirty="0" smtClean="0"/>
+              <a:t> by 2050 (or </a:t>
+            </a:r>
+            <a:r>
+              <a:rPr lang="fr-FR" sz="1600" dirty="0" err="1" smtClean="0"/>
+              <a:t>much</a:t>
+            </a:r>
+            <a:r>
+              <a:rPr lang="fr-FR" sz="1600" dirty="0" smtClean="0"/>
+              <a:t> </a:t>
+            </a:r>
+            <a:r>
+              <a:rPr lang="fr-FR" sz="1600" dirty="0" err="1" smtClean="0"/>
+              <a:t>earlier</a:t>
+            </a:r>
+            <a:r>
+              <a:rPr lang="fr-FR" sz="1600" dirty="0" smtClean="0"/>
+              <a:t>…) </a:t>
+            </a:r>
+            <a:endParaRPr lang="fr-FR" sz="1600" dirty="0"/>
+          </a:p>
+        </p:txBody>
+      </p:sp>
+      <p:pic>
+        <p:nvPicPr>
+          <p:cNvPr id="11" name="Image 10"/>
+          <p:cNvPicPr>
+            <a:picLocks noChangeAspect="1"/>
+          </p:cNvPicPr>
           <p:nvPr/>
-        </p:nvSpPr>
-        <p:spPr>
-          <a:xfrm>
-            <a:off x="822960" y="2573383"/>
-            <a:ext cx="4402183" cy="584775"/>
+        </p:nvPicPr>
+        <p:blipFill>
+          <a:blip r:embed="rId2"/>
+          <a:stretch>
+            <a:fillRect/>
+          </a:stretch>
+        </p:blipFill>
+        <p:spPr>
+          <a:xfrm>
+            <a:off x="1211330" y="2050869"/>
+            <a:ext cx="4681212" cy="3510909"/>
           </a:xfrm>
           <a:prstGeom prst="rect">
             <a:avLst/>
           </a:prstGeom>
-          <a:noFill/>
-        </p:spPr>
-        <p:txBody>
-          <a:bodyPr wrap="square" rtlCol="0">
-            <a:spAutoFit/>
-          </a:bodyPr>
-          <a:lstStyle/>
-          <a:p>
-            <a:pPr algn="ctr"/>
-            <a:r>
-              <a:rPr lang="fr-FR" sz="1600" dirty="0" smtClean="0"/>
-              <a:t>A </a:t>
-            </a:r>
-            <a:r>
-              <a:rPr lang="fr-FR" sz="1600" dirty="0" err="1" smtClean="0"/>
-              <a:t>fundamental</a:t>
-            </a:r>
-            <a:r>
-              <a:rPr lang="fr-FR" sz="1600" dirty="0" smtClean="0"/>
-              <a:t> </a:t>
-            </a:r>
-            <a:r>
-              <a:rPr lang="fr-FR" sz="1600" dirty="0" err="1" smtClean="0"/>
-              <a:t>paradigm</a:t>
-            </a:r>
-            <a:r>
-              <a:rPr lang="fr-FR" sz="1600" dirty="0" smtClean="0"/>
-              <a:t> change in </a:t>
-            </a:r>
-            <a:r>
-              <a:rPr lang="fr-FR" sz="1600" dirty="0" err="1" smtClean="0"/>
-              <a:t>what</a:t>
-            </a:r>
-            <a:r>
-              <a:rPr lang="fr-FR" sz="1600" dirty="0" smtClean="0"/>
-              <a:t> </a:t>
-            </a:r>
-            <a:r>
-              <a:rPr lang="fr-FR" sz="1600" dirty="0" err="1" smtClean="0"/>
-              <a:t>you</a:t>
-            </a:r>
-            <a:r>
-              <a:rPr lang="fr-FR" sz="1600" dirty="0" smtClean="0"/>
-              <a:t> are </a:t>
-            </a:r>
-            <a:r>
-              <a:rPr lang="fr-FR" sz="1600" dirty="0" err="1" smtClean="0"/>
-              <a:t>measuring</a:t>
-            </a:r>
-            <a:r>
-              <a:rPr lang="fr-FR" sz="1600" dirty="0" smtClean="0"/>
-              <a:t>.</a:t>
-            </a:r>
-            <a:endParaRPr lang="fr-FR" sz="1600" dirty="0"/>
-          </a:p>
-        </p:txBody>
-      </p:sp>
+        </p:spPr>
+      </p:pic>
     </p:spTree>
     <p:extLst>
       <p:ext uri="{BB962C8B-B14F-4D97-AF65-F5344CB8AC3E}">
@@ -13611,14 +13681,26 @@
           <a:p>
             <a:pPr algn="ctr"/>
             <a:r>
-              <a:rPr lang="fr-FR" sz="1400" dirty="0" smtClean="0"/>
+              <a:rPr lang="fr-FR" sz="1400" b="1" dirty="0" smtClean="0">
+                <a:solidFill>
+                  <a:schemeClr val="accent3"/>
+                </a:solidFill>
+              </a:rPr>
               <a:t>Spam </a:t>
             </a:r>
             <a:r>
-              <a:rPr lang="fr-FR" sz="1400" dirty="0" err="1" smtClean="0"/>
+              <a:rPr lang="fr-FR" sz="1400" b="1" dirty="0" err="1" smtClean="0">
+                <a:solidFill>
+                  <a:schemeClr val="accent3"/>
+                </a:solidFill>
+              </a:rPr>
               <a:t>detected</a:t>
             </a:r>
-            <a:endParaRPr lang="fr-FR" sz="1400" dirty="0"/>
+            <a:endParaRPr lang="fr-FR" sz="1400" b="1" dirty="0">
+              <a:solidFill>
+                <a:schemeClr val="accent3"/>
+              </a:solidFill>
+            </a:endParaRPr>
           </a:p>
         </p:txBody>
       </p:sp>
@@ -13692,14 +13774,26 @@
           <a:p>
             <a:pPr algn="ctr"/>
             <a:r>
-              <a:rPr lang="fr-FR" sz="1400" dirty="0" smtClean="0"/>
+              <a:rPr lang="fr-FR" sz="1400" b="1" dirty="0" smtClean="0">
+                <a:solidFill>
+                  <a:srgbClr val="C00000"/>
+                </a:solidFill>
+              </a:rPr>
               <a:t>Not </a:t>
             </a:r>
             <a:r>
-              <a:rPr lang="fr-FR" sz="1400" dirty="0" err="1" smtClean="0"/>
+              <a:rPr lang="fr-FR" sz="1400" b="1" dirty="0" err="1" smtClean="0">
+                <a:solidFill>
+                  <a:srgbClr val="C00000"/>
+                </a:solidFill>
+              </a:rPr>
               <a:t>detected</a:t>
             </a:r>
-            <a:endParaRPr lang="fr-FR" sz="1400" dirty="0"/>
+            <a:endParaRPr lang="fr-FR" sz="1400" b="1" dirty="0">
+              <a:solidFill>
+                <a:srgbClr val="C00000"/>
+              </a:solidFill>
+            </a:endParaRPr>
           </a:p>
         </p:txBody>
       </p:sp>
@@ -13802,7 +13896,7 @@
         <p:spPr>
           <a:xfrm>
             <a:off x="9993086" y="3348230"/>
-            <a:ext cx="1345475" cy="600164"/>
+            <a:ext cx="1345475" cy="769441"/>
           </a:xfrm>
           <a:prstGeom prst="rect">
             <a:avLst/>
@@ -13847,6 +13941,22 @@
             <a:r>
               <a:rPr lang="fr-FR" sz="1100" dirty="0" err="1" smtClean="0"/>
               <a:t>checked</a:t>
+            </a:r>
+            <a:r>
+              <a:rPr lang="fr-FR" sz="1100" dirty="0" smtClean="0"/>
+              <a:t> to </a:t>
+            </a:r>
+            <a:r>
+              <a:rPr lang="fr-FR" sz="1100" dirty="0" err="1" smtClean="0"/>
+              <a:t>detect</a:t>
+            </a:r>
+            <a:r>
+              <a:rPr lang="fr-FR" sz="1100" dirty="0" smtClean="0"/>
+              <a:t> </a:t>
+            </a:r>
+            <a:r>
+              <a:rPr lang="fr-FR" sz="1100" dirty="0" err="1" smtClean="0"/>
+              <a:t>phishing</a:t>
             </a:r>
             <a:endParaRPr lang="fr-FR" sz="1100" dirty="0"/>
           </a:p>
@@ -13861,9 +13971,9 @@
           <p:nvPr/>
         </p:nvCxnSpPr>
         <p:spPr>
-          <a:xfrm flipH="1">
-            <a:off x="8574635" y="3648312"/>
-            <a:ext cx="1418451" cy="0"/>
+          <a:xfrm flipH="1" flipV="1">
+            <a:off x="8574636" y="3648312"/>
+            <a:ext cx="1418450" cy="84639"/>
           </a:xfrm>
           <a:prstGeom prst="straightConnector1">
             <a:avLst/>
@@ -14088,6 +14198,545 @@
 </file>
 
 <file path=ppt/slides/slide6.xml><?xml version="1.0" encoding="utf-8"?>
+<p:sld xmlns:a="http://schemas.openxmlformats.org/drawingml/2006/main" xmlns:r="http://schemas.openxmlformats.org/officeDocument/2006/relationships" xmlns:p="http://schemas.openxmlformats.org/presentationml/2006/main">
+  <p:cSld>
+    <p:spTree>
+      <p:nvGrpSpPr>
+        <p:cNvPr id="1" name=""/>
+        <p:cNvGrpSpPr/>
+        <p:nvPr/>
+      </p:nvGrpSpPr>
+      <p:grpSpPr>
+        <a:xfrm>
+          <a:off x="0" y="0"/>
+          <a:ext cx="0" cy="0"/>
+          <a:chOff x="0" y="0"/>
+          <a:chExt cx="0" cy="0"/>
+        </a:xfrm>
+      </p:grpSpPr>
+      <p:sp>
+        <p:nvSpPr>
+          <p:cNvPr id="2" name="Titre 1"/>
+          <p:cNvSpPr>
+            <a:spLocks noGrp="1"/>
+          </p:cNvSpPr>
+          <p:nvPr>
+            <p:ph type="title"/>
+          </p:nvPr>
+        </p:nvSpPr>
+        <p:spPr/>
+        <p:txBody>
+          <a:bodyPr/>
+          <a:lstStyle/>
+          <a:p>
+            <a:r>
+              <a:rPr lang="fr-FR" dirty="0" smtClean="0"/>
+              <a:t>How to </a:t>
+            </a:r>
+            <a:r>
+              <a:rPr lang="fr-FR" dirty="0" err="1" smtClean="0"/>
+              <a:t>detect</a:t>
+            </a:r>
+            <a:r>
+              <a:rPr lang="fr-FR" dirty="0" smtClean="0"/>
+              <a:t>, </a:t>
+            </a:r>
+            <a:r>
+              <a:rPr lang="fr-FR" dirty="0" err="1" smtClean="0"/>
+              <a:t>prevent</a:t>
+            </a:r>
+            <a:r>
+              <a:rPr lang="fr-FR" dirty="0" smtClean="0"/>
+              <a:t> and </a:t>
+            </a:r>
+            <a:r>
+              <a:rPr lang="fr-FR" dirty="0" err="1" smtClean="0"/>
+              <a:t>treat</a:t>
+            </a:r>
+            <a:r>
+              <a:rPr lang="fr-FR" dirty="0" smtClean="0"/>
+              <a:t> drift</a:t>
+            </a:r>
+            <a:endParaRPr lang="fr-FR" dirty="0"/>
+          </a:p>
+        </p:txBody>
+      </p:sp>
+      <p:sp>
+        <p:nvSpPr>
+          <p:cNvPr id="4" name="Espace réservé du numéro de diapositive 3"/>
+          <p:cNvSpPr>
+            <a:spLocks noGrp="1"/>
+          </p:cNvSpPr>
+          <p:nvPr>
+            <p:ph type="sldNum" sz="quarter" idx="4"/>
+          </p:nvPr>
+        </p:nvSpPr>
+        <p:spPr/>
+        <p:txBody>
+          <a:bodyPr/>
+          <a:lstStyle/>
+          <a:p>
+            <a:pPr>
+              <a:defRPr/>
+            </a:pPr>
+            <a:fld id="{F4FEB08F-923E-484A-9FC5-0AA7BDA29BD6}" type="slidenum">
+              <a:rPr lang="fr-FR" smtClean="0"/>
+              <a:pPr>
+                <a:defRPr/>
+              </a:pPr>
+              <a:t>6</a:t>
+            </a:fld>
+            <a:endParaRPr lang="fr-FR" dirty="0"/>
+          </a:p>
+        </p:txBody>
+      </p:sp>
+      <p:sp>
+        <p:nvSpPr>
+          <p:cNvPr id="5" name="Espace réservé du pied de page 4"/>
+          <p:cNvSpPr>
+            <a:spLocks noGrp="1"/>
+          </p:cNvSpPr>
+          <p:nvPr>
+            <p:ph type="ftr" sz="quarter" idx="3"/>
+          </p:nvPr>
+        </p:nvSpPr>
+        <p:spPr/>
+        <p:txBody>
+          <a:bodyPr/>
+          <a:lstStyle/>
+          <a:p>
+            <a:r>
+              <a:rPr lang="en-US"/>
+              <a:t>2025 | ©HeadMind Partners AI &amp; Blockchain | Confidentiel</a:t>
+            </a:r>
+            <a:endParaRPr lang="fr-FR" dirty="0"/>
+          </a:p>
+        </p:txBody>
+      </p:sp>
+      <p:sp>
+        <p:nvSpPr>
+          <p:cNvPr id="8" name="ZoneTexte 7"/>
+          <p:cNvSpPr txBox="1"/>
+          <p:nvPr/>
+        </p:nvSpPr>
+        <p:spPr>
+          <a:xfrm>
+            <a:off x="1771015" y="1737360"/>
+            <a:ext cx="3153802" cy="369332"/>
+          </a:xfrm>
+          <a:prstGeom prst="rect">
+            <a:avLst/>
+          </a:prstGeom>
+          <a:noFill/>
+        </p:spPr>
+        <p:txBody>
+          <a:bodyPr wrap="square" rtlCol="0">
+            <a:spAutoFit/>
+          </a:bodyPr>
+          <a:lstStyle/>
+          <a:p>
+            <a:pPr algn="ctr"/>
+            <a:r>
+              <a:rPr lang="fr-FR" dirty="0" smtClean="0"/>
+              <a:t>A non-</a:t>
+            </a:r>
+            <a:r>
+              <a:rPr lang="fr-FR" dirty="0" err="1" smtClean="0"/>
+              <a:t>predictive</a:t>
+            </a:r>
+            <a:r>
+              <a:rPr lang="fr-FR" dirty="0" smtClean="0"/>
+              <a:t> </a:t>
+            </a:r>
+            <a:r>
+              <a:rPr lang="fr-FR" dirty="0" err="1" smtClean="0"/>
+              <a:t>approach</a:t>
+            </a:r>
+            <a:endParaRPr lang="fr-FR" dirty="0"/>
+          </a:p>
+        </p:txBody>
+      </p:sp>
+      <p:sp>
+        <p:nvSpPr>
+          <p:cNvPr id="12" name="ZoneTexte 11"/>
+          <p:cNvSpPr txBox="1"/>
+          <p:nvPr/>
+        </p:nvSpPr>
+        <p:spPr>
+          <a:xfrm>
+            <a:off x="7154091" y="1737360"/>
+            <a:ext cx="2573382" cy="369332"/>
+          </a:xfrm>
+          <a:prstGeom prst="rect">
+            <a:avLst/>
+          </a:prstGeom>
+          <a:noFill/>
+        </p:spPr>
+        <p:txBody>
+          <a:bodyPr wrap="square" rtlCol="0">
+            <a:spAutoFit/>
+          </a:bodyPr>
+          <a:lstStyle/>
+          <a:p>
+            <a:pPr algn="ctr"/>
+            <a:r>
+              <a:rPr lang="fr-FR" dirty="0" smtClean="0"/>
+              <a:t>A </a:t>
+            </a:r>
+            <a:r>
+              <a:rPr lang="fr-FR" dirty="0" err="1" smtClean="0"/>
+              <a:t>predictive</a:t>
+            </a:r>
+            <a:r>
+              <a:rPr lang="fr-FR" dirty="0" smtClean="0"/>
+              <a:t> </a:t>
+            </a:r>
+            <a:r>
+              <a:rPr lang="fr-FR" dirty="0" err="1" smtClean="0"/>
+              <a:t>approach</a:t>
+            </a:r>
+            <a:endParaRPr lang="fr-FR" dirty="0"/>
+          </a:p>
+        </p:txBody>
+      </p:sp>
+      <p:sp>
+        <p:nvSpPr>
+          <p:cNvPr id="13" name="ZoneTexte 12"/>
+          <p:cNvSpPr txBox="1"/>
+          <p:nvPr/>
+        </p:nvSpPr>
+        <p:spPr>
+          <a:xfrm>
+            <a:off x="511908" y="2776866"/>
+            <a:ext cx="5209623" cy="1323439"/>
+          </a:xfrm>
+          <a:prstGeom prst="rect">
+            <a:avLst/>
+          </a:prstGeom>
+          <a:noFill/>
+        </p:spPr>
+        <p:txBody>
+          <a:bodyPr wrap="square" rtlCol="0">
+            <a:spAutoFit/>
+          </a:bodyPr>
+          <a:lstStyle/>
+          <a:p>
+            <a:pPr marL="285750" indent="-285750">
+              <a:buFontTx/>
+              <a:buChar char="-"/>
+            </a:pPr>
+            <a:r>
+              <a:rPr lang="fr-FR" sz="1600" dirty="0" err="1" smtClean="0"/>
+              <a:t>Statistical</a:t>
+            </a:r>
+            <a:r>
+              <a:rPr lang="fr-FR" sz="1600" dirty="0" smtClean="0"/>
+              <a:t> test </a:t>
+            </a:r>
+            <a:r>
+              <a:rPr lang="fr-FR" sz="1600" dirty="0" err="1" smtClean="0"/>
+              <a:t>comparing</a:t>
+            </a:r>
+            <a:r>
+              <a:rPr lang="fr-FR" sz="1600" dirty="0" smtClean="0"/>
+              <a:t> 2 distributions (K-S test, PSI…) -&gt; data drift</a:t>
+            </a:r>
+          </a:p>
+          <a:p>
+            <a:pPr marL="285750" indent="-285750">
+              <a:buFontTx/>
+              <a:buChar char="-"/>
+            </a:pPr>
+            <a:r>
+              <a:rPr lang="fr-FR" sz="1600" dirty="0" smtClean="0"/>
+              <a:t>Set </a:t>
+            </a:r>
+            <a:r>
+              <a:rPr lang="fr-FR" sz="1600" dirty="0" err="1" smtClean="0"/>
+              <a:t>thresholds</a:t>
+            </a:r>
+            <a:r>
+              <a:rPr lang="fr-FR" sz="1600" dirty="0" smtClean="0"/>
+              <a:t> for </a:t>
+            </a:r>
+            <a:r>
+              <a:rPr lang="fr-FR" sz="1600" dirty="0" err="1" smtClean="0"/>
+              <a:t>accuracy</a:t>
+            </a:r>
+            <a:r>
+              <a:rPr lang="fr-FR" sz="1600" dirty="0" smtClean="0"/>
+              <a:t> or </a:t>
+            </a:r>
+            <a:r>
+              <a:rPr lang="fr-FR" sz="1600" dirty="0" err="1" smtClean="0"/>
+              <a:t>loss</a:t>
+            </a:r>
+            <a:r>
+              <a:rPr lang="fr-FR" sz="1600" dirty="0" smtClean="0"/>
+              <a:t> and </a:t>
+            </a:r>
+            <a:r>
+              <a:rPr lang="fr-FR" sz="1600" dirty="0" err="1" smtClean="0"/>
+              <a:t>alerts</a:t>
+            </a:r>
+            <a:r>
+              <a:rPr lang="fr-FR" sz="1600" dirty="0" smtClean="0"/>
+              <a:t> </a:t>
+            </a:r>
+            <a:r>
+              <a:rPr lang="fr-FR" sz="1600" dirty="0" err="1" smtClean="0"/>
+              <a:t>when</a:t>
+            </a:r>
+            <a:r>
+              <a:rPr lang="fr-FR" sz="1600" dirty="0" smtClean="0"/>
+              <a:t> </a:t>
+            </a:r>
+            <a:r>
+              <a:rPr lang="fr-FR" sz="1600" dirty="0" err="1" smtClean="0"/>
+              <a:t>thresholds</a:t>
+            </a:r>
+            <a:r>
+              <a:rPr lang="fr-FR" sz="1600" dirty="0" smtClean="0"/>
+              <a:t> are </a:t>
+            </a:r>
+            <a:r>
+              <a:rPr lang="fr-FR" sz="1600" dirty="0" err="1" smtClean="0"/>
+              <a:t>reached</a:t>
+            </a:r>
+            <a:endParaRPr lang="fr-FR" sz="1600" dirty="0" smtClean="0"/>
+          </a:p>
+          <a:p>
+            <a:pPr marL="285750" indent="-285750">
+              <a:buFontTx/>
+              <a:buChar char="-"/>
+            </a:pPr>
+            <a:r>
+              <a:rPr lang="fr-FR" sz="1600" b="1" dirty="0" err="1" smtClean="0"/>
+              <a:t>Continuous</a:t>
+            </a:r>
+            <a:r>
+              <a:rPr lang="fr-FR" sz="1600" b="1" dirty="0" smtClean="0"/>
+              <a:t> Training</a:t>
+            </a:r>
+            <a:endParaRPr lang="fr-FR" sz="1600" b="1" dirty="0"/>
+          </a:p>
+        </p:txBody>
+      </p:sp>
+      <p:sp>
+        <p:nvSpPr>
+          <p:cNvPr id="14" name="ZoneTexte 13"/>
+          <p:cNvSpPr txBox="1"/>
+          <p:nvPr/>
+        </p:nvSpPr>
+        <p:spPr>
+          <a:xfrm>
+            <a:off x="6038902" y="2572726"/>
+            <a:ext cx="5209623" cy="1631216"/>
+          </a:xfrm>
+          <a:prstGeom prst="rect">
+            <a:avLst/>
+          </a:prstGeom>
+          <a:noFill/>
+        </p:spPr>
+        <p:txBody>
+          <a:bodyPr wrap="square" rtlCol="0">
+            <a:spAutoFit/>
+          </a:bodyPr>
+          <a:lstStyle/>
+          <a:p>
+            <a:pPr marL="285750" indent="-285750">
+              <a:buFontTx/>
+              <a:buChar char="-"/>
+            </a:pPr>
+            <a:r>
+              <a:rPr lang="fr-FR" sz="1600" dirty="0" smtClean="0"/>
+              <a:t>Use Machine </a:t>
+            </a:r>
+            <a:r>
+              <a:rPr lang="fr-FR" sz="1600" dirty="0" err="1" smtClean="0"/>
+              <a:t>Learnig</a:t>
+            </a:r>
+            <a:r>
+              <a:rPr lang="fr-FR" sz="1600" dirty="0" smtClean="0"/>
+              <a:t> </a:t>
+            </a:r>
+            <a:r>
+              <a:rPr lang="fr-FR" sz="1600" dirty="0" err="1" smtClean="0"/>
+              <a:t>algorithms</a:t>
+            </a:r>
+            <a:r>
+              <a:rPr lang="fr-FR" sz="1600" dirty="0" smtClean="0"/>
+              <a:t> on the </a:t>
+            </a:r>
+            <a:r>
+              <a:rPr lang="fr-FR" sz="1600" dirty="0" err="1" smtClean="0"/>
+              <a:t>loss</a:t>
+            </a:r>
+            <a:r>
+              <a:rPr lang="fr-FR" sz="1600" dirty="0" smtClean="0"/>
+              <a:t> to </a:t>
+            </a:r>
+            <a:r>
+              <a:rPr lang="fr-FR" sz="1600" dirty="0" err="1" smtClean="0"/>
+              <a:t>predict</a:t>
+            </a:r>
+            <a:r>
+              <a:rPr lang="fr-FR" sz="1600" dirty="0" smtClean="0"/>
+              <a:t> drift</a:t>
+            </a:r>
+          </a:p>
+          <a:p>
+            <a:pPr marL="285750" indent="-285750">
+              <a:buFontTx/>
+              <a:buChar char="-"/>
+            </a:pPr>
+            <a:r>
+              <a:rPr lang="fr-FR" sz="1600" dirty="0" err="1" smtClean="0"/>
+              <a:t>Predicting</a:t>
+            </a:r>
+            <a:r>
+              <a:rPr lang="fr-FR" sz="1600" dirty="0" smtClean="0"/>
+              <a:t> drift </a:t>
+            </a:r>
+            <a:r>
+              <a:rPr lang="fr-FR" sz="1600" dirty="0" err="1" smtClean="0"/>
+              <a:t>is</a:t>
+            </a:r>
+            <a:r>
+              <a:rPr lang="fr-FR" sz="1600" dirty="0" smtClean="0"/>
+              <a:t> </a:t>
+            </a:r>
+            <a:r>
+              <a:rPr lang="fr-FR" sz="1600" dirty="0" err="1" smtClean="0"/>
+              <a:t>quite</a:t>
+            </a:r>
+            <a:r>
+              <a:rPr lang="fr-FR" sz="1600" dirty="0" smtClean="0"/>
+              <a:t> </a:t>
+            </a:r>
+            <a:r>
+              <a:rPr lang="fr-FR" sz="1600" dirty="0" err="1" smtClean="0"/>
+              <a:t>difficult</a:t>
+            </a:r>
+            <a:r>
+              <a:rPr lang="fr-FR" sz="1600" dirty="0" smtClean="0"/>
+              <a:t> but </a:t>
+            </a:r>
+            <a:r>
+              <a:rPr lang="fr-FR" sz="1600" dirty="0" err="1" smtClean="0"/>
+              <a:t>very</a:t>
+            </a:r>
+            <a:r>
+              <a:rPr lang="fr-FR" sz="1600" dirty="0" smtClean="0"/>
+              <a:t> important for model performance</a:t>
+            </a:r>
+          </a:p>
+          <a:p>
+            <a:pPr marL="285750" indent="-285750">
+              <a:buFontTx/>
+              <a:buChar char="-"/>
+            </a:pPr>
+            <a:r>
+              <a:rPr lang="fr-FR" sz="1600" dirty="0" smtClean="0"/>
+              <a:t>Domain </a:t>
+            </a:r>
+            <a:r>
+              <a:rPr lang="fr-FR" sz="1600" dirty="0" err="1" smtClean="0"/>
+              <a:t>knowledge</a:t>
+            </a:r>
+            <a:r>
+              <a:rPr lang="fr-FR" sz="1600" dirty="0" smtClean="0"/>
+              <a:t> (</a:t>
+            </a:r>
+            <a:r>
+              <a:rPr lang="fr-FR" sz="1600" dirty="0" err="1" smtClean="0"/>
+              <a:t>knowledge</a:t>
+            </a:r>
+            <a:r>
+              <a:rPr lang="fr-FR" sz="1600" dirty="0" smtClean="0"/>
+              <a:t> </a:t>
+            </a:r>
+            <a:r>
+              <a:rPr lang="fr-FR" sz="1600" dirty="0" err="1" smtClean="0"/>
+              <a:t>that</a:t>
+            </a:r>
+            <a:r>
+              <a:rPr lang="fr-FR" sz="1600" dirty="0" smtClean="0"/>
+              <a:t> </a:t>
+            </a:r>
+            <a:r>
+              <a:rPr lang="fr-FR" sz="1600" dirty="0" err="1" smtClean="0"/>
+              <a:t>phishing</a:t>
+            </a:r>
+            <a:r>
+              <a:rPr lang="fr-FR" sz="1600" dirty="0" smtClean="0"/>
+              <a:t> emails change </a:t>
+            </a:r>
+            <a:r>
+              <a:rPr lang="fr-FR" sz="1600" dirty="0" err="1" smtClean="0"/>
+              <a:t>rapidly</a:t>
+            </a:r>
+            <a:r>
+              <a:rPr lang="fr-FR" sz="1600" dirty="0" smtClean="0"/>
+              <a:t> and </a:t>
+            </a:r>
+            <a:r>
+              <a:rPr lang="fr-FR" sz="1600" dirty="0" err="1" smtClean="0"/>
+              <a:t>drastically</a:t>
+            </a:r>
+            <a:r>
+              <a:rPr lang="fr-FR" sz="1600" dirty="0" smtClean="0"/>
+              <a:t>)</a:t>
+            </a:r>
+            <a:endParaRPr lang="fr-FR" sz="1600" dirty="0"/>
+          </a:p>
+        </p:txBody>
+      </p:sp>
+      <p:pic>
+        <p:nvPicPr>
+          <p:cNvPr id="16" name="Image 15"/>
+          <p:cNvPicPr>
+            <a:picLocks noChangeAspect="1"/>
+          </p:cNvPicPr>
+          <p:nvPr/>
+        </p:nvPicPr>
+        <p:blipFill>
+          <a:blip r:embed="rId2"/>
+          <a:stretch>
+            <a:fillRect/>
+          </a:stretch>
+        </p:blipFill>
+        <p:spPr>
+          <a:xfrm>
+            <a:off x="3790547" y="4167201"/>
+            <a:ext cx="3424727" cy="1926409"/>
+          </a:xfrm>
+          <a:prstGeom prst="rect">
+            <a:avLst/>
+          </a:prstGeom>
+        </p:spPr>
+      </p:pic>
+    </p:spTree>
+    <p:extLst>
+      <p:ext uri="{BB962C8B-B14F-4D97-AF65-F5344CB8AC3E}">
+        <p14:creationId xmlns:p14="http://schemas.microsoft.com/office/powerpoint/2010/main" val="2935526733"/>
+      </p:ext>
+    </p:extLst>
+  </p:cSld>
+  <p:clrMapOvr>
+    <a:masterClrMapping/>
+  </p:clrMapOvr>
+  <p:timing>
+    <p:tnLst>
+      <p:par>
+        <p:cTn id="1" dur="indefinite" restart="never" nodeType="tmRoot"/>
+      </p:par>
+    </p:tnLst>
+  </p:timing>
+</p:sld>
+</file>
+
+<file path=ppt/slides/slide7.xml><?xml version="1.0" encoding="utf-8"?>
 <p:sld xmlns:a="http://schemas.openxmlformats.org/drawingml/2006/main" xmlns:r="http://schemas.openxmlformats.org/officeDocument/2006/relationships" xmlns:p="http://schemas.openxmlformats.org/presentationml/2006/main" show="0">
   <p:cSld>
     <p:spTree>
@@ -14127,7 +14776,7 @@
               <a:pPr>
                 <a:defRPr/>
               </a:pPr>
-              <a:t>6</a:t>
+              <a:t>7</a:t>
             </a:fld>
             <a:endParaRPr lang="fr-FR" dirty="0"/>
           </a:p>
@@ -14204,11 +14853,11 @@
   <p:clrMapOvr>
     <a:masterClrMapping/>
   </p:clrMapOvr>
-  <mc:AlternateContent xmlns:mc="http://schemas.openxmlformats.org/markup-compatibility/2006">
-    <mc:Choice xmlns:p14="http://schemas.microsoft.com/office/powerpoint/2010/main" Requires="p14">
+  <mc:AlternateContent xmlns:mc="http://schemas.openxmlformats.org/markup-compatibility/2006" xmlns:p14="http://schemas.microsoft.com/office/powerpoint/2010/main">
+    <mc:Choice Requires="p14">
       <p:transition spd="slow" p14:dur="2000"/>
     </mc:Choice>
-    <mc:Fallback>
+    <mc:Fallback xmlns="">
       <p:transition spd="slow"/>
     </mc:Fallback>
   </mc:AlternateContent>
@@ -14707,6 +15356,15 @@
 </file>
 
 <file path=customXml/item1.xml><?xml version="1.0" encoding="utf-8"?>
+<?mso-contentType ?>
+<FormTemplates xmlns="http://schemas.microsoft.com/sharepoint/v3/contenttype/forms">
+  <Display>DocumentLibraryForm</Display>
+  <Edit>DocumentLibraryForm</Edit>
+  <New>DocumentLibraryForm</New>
+</FormTemplates>
+</file>
+
+<file path=customXml/item2.xml><?xml version="1.0" encoding="utf-8"?>
 <ct:contentTypeSchema xmlns:ct="http://schemas.microsoft.com/office/2006/metadata/contentType" xmlns:ma="http://schemas.microsoft.com/office/2006/metadata/properties/metaAttributes" ct:_="" ma:_="" ma:contentTypeName="Document" ma:contentTypeID="0x01010015A7D101A348B14A94655631DF750AA1" ma:contentTypeVersion="4" ma:contentTypeDescription="Crée un document." ma:contentTypeScope="" ma:versionID="fed68bb662835b4038222b804832b9d4">
   <xsd:schema xmlns:xsd="http://www.w3.org/2001/XMLSchema" xmlns:xs="http://www.w3.org/2001/XMLSchema" xmlns:p="http://schemas.microsoft.com/office/2006/metadata/properties" xmlns:ns2="6176059f-ff8d-42ce-80af-7cd109a8b82a" targetNamespace="http://schemas.microsoft.com/office/2006/metadata/properties" ma:root="true" ma:fieldsID="6ddf66af974ec1f0d42682f9aaee72aa" ns2:_="">
     <xsd:import namespace="6176059f-ff8d-42ce-80af-7cd109a8b82a"/>
@@ -14850,15 +15508,6 @@
 </ct:contentTypeSchema>
 </file>
 
-<file path=customXml/item2.xml><?xml version="1.0" encoding="utf-8"?>
-<?mso-contentType ?>
-<FormTemplates xmlns="http://schemas.microsoft.com/sharepoint/v3/contenttype/forms">
-  <Display>DocumentLibraryForm</Display>
-  <Edit>DocumentLibraryForm</Edit>
-  <New>DocumentLibraryForm</New>
-</FormTemplates>
-</file>
-
 <file path=customXml/item3.xml><?xml version="1.0" encoding="utf-8"?>
 <p:properties xmlns:p="http://schemas.microsoft.com/office/2006/metadata/properties" xmlns:xsi="http://www.w3.org/2001/XMLSchema-instance" xmlns:pc="http://schemas.microsoft.com/office/infopath/2007/PartnerControls">
   <documentManagement/>
@@ -14866,6 +15515,14 @@
 </file>
 
 <file path=customXml/itemProps1.xml><?xml version="1.0" encoding="utf-8"?>
+<ds:datastoreItem xmlns:ds="http://schemas.openxmlformats.org/officeDocument/2006/customXml" ds:itemID="{C24B94D7-ED94-4192-97DD-11B73E358477}">
+  <ds:schemaRefs>
+    <ds:schemaRef ds:uri="http://schemas.microsoft.com/sharepoint/v3/contenttype/forms"/>
+  </ds:schemaRefs>
+</ds:datastoreItem>
+</file>
+
+<file path=customXml/itemProps2.xml><?xml version="1.0" encoding="utf-8"?>
 <ds:datastoreItem xmlns:ds="http://schemas.openxmlformats.org/officeDocument/2006/customXml" ds:itemID="{20F9394D-AB15-48BC-9DC9-07AEFB8E408A}">
   <ds:schemaRefs>
     <ds:schemaRef ds:uri="http://schemas.microsoft.com/office/2006/metadata/contentType"/>
@@ -14879,14 +15536,6 @@
     <ds:schemaRef ds:uri="http://purl.org/dc/elements/1.1/"/>
     <ds:schemaRef ds:uri="http://purl.org/dc/terms/"/>
     <ds:schemaRef ds:uri="http://schemas.microsoft.com/internal/obd"/>
-  </ds:schemaRefs>
-</ds:datastoreItem>
-</file>
-
-<file path=customXml/itemProps2.xml><?xml version="1.0" encoding="utf-8"?>
-<ds:datastoreItem xmlns:ds="http://schemas.openxmlformats.org/officeDocument/2006/customXml" ds:itemID="{C24B94D7-ED94-4192-97DD-11B73E358477}">
-  <ds:schemaRefs>
-    <ds:schemaRef ds:uri="http://schemas.microsoft.com/sharepoint/v3/contenttype/forms"/>
   </ds:schemaRefs>
 </ds:datastoreItem>
 </file>
